--- a/Linear_Algebra/w1_w2_System_of_Linear_Equations.pptx
+++ b/Linear_Algebra/w1_w2_System_of_Linear_Equations.pptx
@@ -5,10 +5,10 @@
     <p:sldMasterId id="2147483660" r:id="rId1"/>
   </p:sldMasterIdLst>
   <p:notesMasterIdLst>
-    <p:notesMasterId r:id="rId24"/>
+    <p:notesMasterId r:id="rId22"/>
   </p:notesMasterIdLst>
   <p:handoutMasterIdLst>
-    <p:handoutMasterId r:id="rId25"/>
+    <p:handoutMasterId r:id="rId23"/>
   </p:handoutMasterIdLst>
   <p:sldIdLst>
     <p:sldId id="256" r:id="rId2"/>
@@ -31,8 +31,6 @@
     <p:sldId id="292" r:id="rId19"/>
     <p:sldId id="293" r:id="rId20"/>
     <p:sldId id="294" r:id="rId21"/>
-    <p:sldId id="295" r:id="rId22"/>
-    <p:sldId id="296" r:id="rId23"/>
   </p:sldIdLst>
   <p:sldSz cx="12192000" cy="6858000"/>
   <p:notesSz cx="6858000" cy="9144000"/>
@@ -160,8 +158,6 @@
             <p14:sldId id="292"/>
             <p14:sldId id="293"/>
             <p14:sldId id="294"/>
-            <p14:sldId id="295"/>
-            <p14:sldId id="296"/>
           </p14:sldIdLst>
         </p14:section>
         <p14:section name="자세한 정보" id="{2CC34DB2-6590-42C0-AD4B-A04C6060184E}">
@@ -286,7 +282,7 @@
                 <a:latin typeface="맑은 고딕" panose="020B0503020000020004" pitchFamily="50" charset="-127"/>
                 <a:ea typeface="맑은 고딕" panose="020B0503020000020004" pitchFamily="50" charset="-127"/>
               </a:rPr>
-              <a:t>2026-04-11</a:t>
+              <a:t>2026-04-19</a:t>
             </a:fld>
             <a:endParaRPr lang="ko-KR" altLang="en-US">
               <a:latin typeface="맑은 고딕" panose="020B0503020000020004" pitchFamily="50" charset="-127"/>
@@ -472,7 +468,7 @@
           <a:p>
             <a:fld id="{43E1C3DD-4A19-441D-907C-380838DB51C4}" type="datetime1">
               <a:rPr lang="ko-KR" altLang="en-US" noProof="0" smtClean="0"/>
-              <a:t>2026-04-11</a:t>
+              <a:t>2026-04-19</a:t>
             </a:fld>
             <a:endParaRPr lang="ko-KR" altLang="en-US" noProof="0"/>
           </a:p>
@@ -1324,242 +1320,6 @@
 </p:notes>
 </file>
 
-<file path=ppt/notesSlides/notesSlide14.xml><?xml version="1.0" encoding="utf-8"?>
-<p:notes xmlns:a="http://schemas.openxmlformats.org/drawingml/2006/main" xmlns:r="http://schemas.openxmlformats.org/officeDocument/2006/relationships" xmlns:p="http://schemas.openxmlformats.org/presentationml/2006/main">
-  <p:cSld>
-    <p:spTree>
-      <p:nvGrpSpPr>
-        <p:cNvPr id="1" name="">
-          <a:extLst>
-            <a:ext uri="{FF2B5EF4-FFF2-40B4-BE49-F238E27FC236}">
-              <a16:creationId xmlns:a16="http://schemas.microsoft.com/office/drawing/2014/main" id="{DF66E429-4172-0104-4675-020C6DB26E11}"/>
-            </a:ext>
-          </a:extLst>
-        </p:cNvPr>
-        <p:cNvGrpSpPr/>
-        <p:nvPr/>
-      </p:nvGrpSpPr>
-      <p:grpSpPr>
-        <a:xfrm>
-          <a:off x="0" y="0"/>
-          <a:ext cx="0" cy="0"/>
-          <a:chOff x="0" y="0"/>
-          <a:chExt cx="0" cy="0"/>
-        </a:xfrm>
-      </p:grpSpPr>
-      <p:sp>
-        <p:nvSpPr>
-          <p:cNvPr id="2" name="슬라이드 이미지 개체 틀 1">
-            <a:extLst>
-              <a:ext uri="{FF2B5EF4-FFF2-40B4-BE49-F238E27FC236}">
-                <a16:creationId xmlns:a16="http://schemas.microsoft.com/office/drawing/2014/main" id="{5D3B268A-27EA-A185-235C-9DD3CFED80CE}"/>
-              </a:ext>
-            </a:extLst>
-          </p:cNvPr>
-          <p:cNvSpPr>
-            <a:spLocks noGrp="1" noRot="1" noChangeAspect="1"/>
-          </p:cNvSpPr>
-          <p:nvPr>
-            <p:ph type="sldImg"/>
-          </p:nvPr>
-        </p:nvSpPr>
-        <p:spPr/>
-      </p:sp>
-      <p:sp>
-        <p:nvSpPr>
-          <p:cNvPr id="3" name="슬라이드 노트 개체 틀 2">
-            <a:extLst>
-              <a:ext uri="{FF2B5EF4-FFF2-40B4-BE49-F238E27FC236}">
-                <a16:creationId xmlns:a16="http://schemas.microsoft.com/office/drawing/2014/main" id="{86346312-6FC9-F192-3682-1DC69CA94464}"/>
-              </a:ext>
-            </a:extLst>
-          </p:cNvPr>
-          <p:cNvSpPr>
-            <a:spLocks noGrp="1"/>
-          </p:cNvSpPr>
-          <p:nvPr>
-            <p:ph type="body" idx="1"/>
-          </p:nvPr>
-        </p:nvSpPr>
-        <p:spPr/>
-        <p:txBody>
-          <a:bodyPr/>
-          <a:lstStyle/>
-          <a:p>
-            <a:endParaRPr lang="ko-KR" altLang="en-US">
-              <a:latin typeface="맑은 고딕" panose="020B0503020000020004" pitchFamily="50" charset="-127"/>
-              <a:ea typeface="맑은 고딕" panose="020B0503020000020004" pitchFamily="50" charset="-127"/>
-            </a:endParaRPr>
-          </a:p>
-        </p:txBody>
-      </p:sp>
-      <p:sp>
-        <p:nvSpPr>
-          <p:cNvPr id="4" name="슬라이드 번호 개체 틀 3">
-            <a:extLst>
-              <a:ext uri="{FF2B5EF4-FFF2-40B4-BE49-F238E27FC236}">
-                <a16:creationId xmlns:a16="http://schemas.microsoft.com/office/drawing/2014/main" id="{49FCCD70-DED8-361A-60D8-0D306AF366C3}"/>
-              </a:ext>
-            </a:extLst>
-          </p:cNvPr>
-          <p:cNvSpPr>
-            <a:spLocks noGrp="1"/>
-          </p:cNvSpPr>
-          <p:nvPr>
-            <p:ph type="sldNum" sz="quarter" idx="5"/>
-          </p:nvPr>
-        </p:nvSpPr>
-        <p:spPr/>
-        <p:txBody>
-          <a:bodyPr/>
-          <a:lstStyle/>
-          <a:p>
-            <a:pPr rtl="0"/>
-            <a:fld id="{DF61EA0F-A667-4B49-8422-0062BC55E249}" type="slidenum">
-              <a:rPr lang="en-US" altLang="ko-KR" smtClean="0">
-                <a:latin typeface="맑은 고딕" panose="020B0503020000020004" pitchFamily="50" charset="-127"/>
-                <a:ea typeface="맑은 고딕" panose="020B0503020000020004" pitchFamily="50" charset="-127"/>
-              </a:rPr>
-              <a:t>21</a:t>
-            </a:fld>
-            <a:endParaRPr lang="ko-KR" altLang="en-US">
-              <a:latin typeface="맑은 고딕" panose="020B0503020000020004" pitchFamily="50" charset="-127"/>
-              <a:ea typeface="맑은 고딕" panose="020B0503020000020004" pitchFamily="50" charset="-127"/>
-            </a:endParaRPr>
-          </a:p>
-        </p:txBody>
-      </p:sp>
-    </p:spTree>
-    <p:extLst>
-      <p:ext uri="{BB962C8B-B14F-4D97-AF65-F5344CB8AC3E}">
-        <p14:creationId xmlns:p14="http://schemas.microsoft.com/office/powerpoint/2010/main" val="2214441740"/>
-      </p:ext>
-    </p:extLst>
-  </p:cSld>
-  <p:clrMapOvr>
-    <a:masterClrMapping/>
-  </p:clrMapOvr>
-</p:notes>
-</file>
-
-<file path=ppt/notesSlides/notesSlide15.xml><?xml version="1.0" encoding="utf-8"?>
-<p:notes xmlns:a="http://schemas.openxmlformats.org/drawingml/2006/main" xmlns:r="http://schemas.openxmlformats.org/officeDocument/2006/relationships" xmlns:p="http://schemas.openxmlformats.org/presentationml/2006/main">
-  <p:cSld>
-    <p:spTree>
-      <p:nvGrpSpPr>
-        <p:cNvPr id="1" name="">
-          <a:extLst>
-            <a:ext uri="{FF2B5EF4-FFF2-40B4-BE49-F238E27FC236}">
-              <a16:creationId xmlns:a16="http://schemas.microsoft.com/office/drawing/2014/main" id="{6E6E415E-8B44-1DBF-87D1-383CE6FF6EA6}"/>
-            </a:ext>
-          </a:extLst>
-        </p:cNvPr>
-        <p:cNvGrpSpPr/>
-        <p:nvPr/>
-      </p:nvGrpSpPr>
-      <p:grpSpPr>
-        <a:xfrm>
-          <a:off x="0" y="0"/>
-          <a:ext cx="0" cy="0"/>
-          <a:chOff x="0" y="0"/>
-          <a:chExt cx="0" cy="0"/>
-        </a:xfrm>
-      </p:grpSpPr>
-      <p:sp>
-        <p:nvSpPr>
-          <p:cNvPr id="2" name="슬라이드 이미지 개체 틀 1">
-            <a:extLst>
-              <a:ext uri="{FF2B5EF4-FFF2-40B4-BE49-F238E27FC236}">
-                <a16:creationId xmlns:a16="http://schemas.microsoft.com/office/drawing/2014/main" id="{751726C8-A4CA-4791-A278-2B3BDC1EF95F}"/>
-              </a:ext>
-            </a:extLst>
-          </p:cNvPr>
-          <p:cNvSpPr>
-            <a:spLocks noGrp="1" noRot="1" noChangeAspect="1"/>
-          </p:cNvSpPr>
-          <p:nvPr>
-            <p:ph type="sldImg"/>
-          </p:nvPr>
-        </p:nvSpPr>
-        <p:spPr/>
-      </p:sp>
-      <p:sp>
-        <p:nvSpPr>
-          <p:cNvPr id="3" name="슬라이드 노트 개체 틀 2">
-            <a:extLst>
-              <a:ext uri="{FF2B5EF4-FFF2-40B4-BE49-F238E27FC236}">
-                <a16:creationId xmlns:a16="http://schemas.microsoft.com/office/drawing/2014/main" id="{DC3E6F32-BACA-53F1-947F-3723994FD927}"/>
-              </a:ext>
-            </a:extLst>
-          </p:cNvPr>
-          <p:cNvSpPr>
-            <a:spLocks noGrp="1"/>
-          </p:cNvSpPr>
-          <p:nvPr>
-            <p:ph type="body" idx="1"/>
-          </p:nvPr>
-        </p:nvSpPr>
-        <p:spPr/>
-        <p:txBody>
-          <a:bodyPr/>
-          <a:lstStyle/>
-          <a:p>
-            <a:endParaRPr lang="ko-KR" altLang="en-US">
-              <a:latin typeface="맑은 고딕" panose="020B0503020000020004" pitchFamily="50" charset="-127"/>
-              <a:ea typeface="맑은 고딕" panose="020B0503020000020004" pitchFamily="50" charset="-127"/>
-            </a:endParaRPr>
-          </a:p>
-        </p:txBody>
-      </p:sp>
-      <p:sp>
-        <p:nvSpPr>
-          <p:cNvPr id="4" name="슬라이드 번호 개체 틀 3">
-            <a:extLst>
-              <a:ext uri="{FF2B5EF4-FFF2-40B4-BE49-F238E27FC236}">
-                <a16:creationId xmlns:a16="http://schemas.microsoft.com/office/drawing/2014/main" id="{7D5F70F2-B462-852F-2EAA-C77B092D5E5C}"/>
-              </a:ext>
-            </a:extLst>
-          </p:cNvPr>
-          <p:cNvSpPr>
-            <a:spLocks noGrp="1"/>
-          </p:cNvSpPr>
-          <p:nvPr>
-            <p:ph type="sldNum" sz="quarter" idx="5"/>
-          </p:nvPr>
-        </p:nvSpPr>
-        <p:spPr/>
-        <p:txBody>
-          <a:bodyPr/>
-          <a:lstStyle/>
-          <a:p>
-            <a:pPr rtl="0"/>
-            <a:fld id="{DF61EA0F-A667-4B49-8422-0062BC55E249}" type="slidenum">
-              <a:rPr lang="en-US" altLang="ko-KR" smtClean="0">
-                <a:latin typeface="맑은 고딕" panose="020B0503020000020004" pitchFamily="50" charset="-127"/>
-                <a:ea typeface="맑은 고딕" panose="020B0503020000020004" pitchFamily="50" charset="-127"/>
-              </a:rPr>
-              <a:t>22</a:t>
-            </a:fld>
-            <a:endParaRPr lang="ko-KR" altLang="en-US">
-              <a:latin typeface="맑은 고딕" panose="020B0503020000020004" pitchFamily="50" charset="-127"/>
-              <a:ea typeface="맑은 고딕" panose="020B0503020000020004" pitchFamily="50" charset="-127"/>
-            </a:endParaRPr>
-          </a:p>
-        </p:txBody>
-      </p:sp>
-    </p:spTree>
-    <p:extLst>
-      <p:ext uri="{BB962C8B-B14F-4D97-AF65-F5344CB8AC3E}">
-        <p14:creationId xmlns:p14="http://schemas.microsoft.com/office/powerpoint/2010/main" val="3333046899"/>
-      </p:ext>
-    </p:extLst>
-  </p:cSld>
-  <p:clrMapOvr>
-    <a:masterClrMapping/>
-  </p:clrMapOvr>
-</p:notes>
-</file>
-
 <file path=ppt/notesSlides/notesSlide2.xml><?xml version="1.0" encoding="utf-8"?>
 <p:notes xmlns:a="http://schemas.openxmlformats.org/drawingml/2006/main" xmlns:r="http://schemas.openxmlformats.org/officeDocument/2006/relationships" xmlns:p="http://schemas.openxmlformats.org/presentationml/2006/main">
   <p:cSld>
@@ -2924,7 +2684,7 @@
           <a:p>
             <a:fld id="{990475B5-67CA-4281-BDCA-DA943C3C8EB3}" type="datetime1">
               <a:rPr lang="ko-KR" altLang="en-US" noProof="0" smtClean="0"/>
-              <a:t>2026-04-11</a:t>
+              <a:t>2026-04-19</a:t>
             </a:fld>
             <a:endParaRPr lang="ko-KR" altLang="en-US" noProof="0"/>
           </a:p>
@@ -3518,7 +3278,7 @@
           <a:p>
             <a:fld id="{48A87A34-81AB-432B-8DAE-1953F412C126}" type="datetimeFigureOut">
               <a:rPr lang="en-US" smtClean="0"/>
-              <a:t>4/11/2026</a:t>
+              <a:t>4/19/2026</a:t>
             </a:fld>
             <a:endParaRPr lang="en-US" dirty="0"/>
           </a:p>
@@ -3786,7 +3546,7 @@
           <a:p>
             <a:fld id="{C655C81E-72E7-4D05-94B5-F45B321A525D}" type="datetime1">
               <a:rPr lang="ko-KR" altLang="en-US" noProof="0" smtClean="0"/>
-              <a:t>2026-04-11</a:t>
+              <a:t>2026-04-19</a:t>
             </a:fld>
             <a:endParaRPr lang="ko-KR" altLang="en-US" noProof="0" dirty="0">
               <a:latin typeface="맑은 고딕" panose="020B0503020000020004" pitchFamily="50" charset="-127"/>
@@ -9172,467 +8932,6 @@
     <p:extLst>
       <p:ext uri="{BB962C8B-B14F-4D97-AF65-F5344CB8AC3E}">
         <p14:creationId xmlns:p14="http://schemas.microsoft.com/office/powerpoint/2010/main" val="2776683073"/>
-      </p:ext>
-    </p:extLst>
-  </p:cSld>
-  <p:clrMapOvr>
-    <a:masterClrMapping/>
-  </p:clrMapOvr>
-  <mc:AlternateContent xmlns:mc="http://schemas.openxmlformats.org/markup-compatibility/2006" xmlns:p14="http://schemas.microsoft.com/office/powerpoint/2010/main">
-    <mc:Choice Requires="p14">
-      <p:transition p14:dur="10"/>
-    </mc:Choice>
-    <mc:Fallback xmlns="">
-      <p:transition/>
-    </mc:Fallback>
-  </mc:AlternateContent>
-</p:sld>
-</file>
-
-<file path=ppt/slides/slide21.xml><?xml version="1.0" encoding="utf-8"?>
-<p:sld xmlns:a="http://schemas.openxmlformats.org/drawingml/2006/main" xmlns:r="http://schemas.openxmlformats.org/officeDocument/2006/relationships" xmlns:p="http://schemas.openxmlformats.org/presentationml/2006/main">
-  <p:cSld>
-    <p:spTree>
-      <p:nvGrpSpPr>
-        <p:cNvPr id="1" name="">
-          <a:extLst>
-            <a:ext uri="{FF2B5EF4-FFF2-40B4-BE49-F238E27FC236}">
-              <a16:creationId xmlns:a16="http://schemas.microsoft.com/office/drawing/2014/main" id="{9C9A7A78-9A48-AA10-5785-D0F00D44FF94}"/>
-            </a:ext>
-          </a:extLst>
-        </p:cNvPr>
-        <p:cNvGrpSpPr/>
-        <p:nvPr/>
-      </p:nvGrpSpPr>
-      <p:grpSpPr>
-        <a:xfrm>
-          <a:off x="0" y="0"/>
-          <a:ext cx="0" cy="0"/>
-          <a:chOff x="0" y="0"/>
-          <a:chExt cx="0" cy="0"/>
-        </a:xfrm>
-      </p:grpSpPr>
-      <p:sp>
-        <p:nvSpPr>
-          <p:cNvPr id="4" name="제목 3">
-            <a:extLst>
-              <a:ext uri="{FF2B5EF4-FFF2-40B4-BE49-F238E27FC236}">
-                <a16:creationId xmlns:a16="http://schemas.microsoft.com/office/drawing/2014/main" id="{7822916A-F4FB-A1F9-4AAF-CE84AE99EEA5}"/>
-              </a:ext>
-            </a:extLst>
-          </p:cNvPr>
-          <p:cNvSpPr>
-            <a:spLocks noGrp="1"/>
-          </p:cNvSpPr>
-          <p:nvPr>
-            <p:ph type="title"/>
-          </p:nvPr>
-        </p:nvSpPr>
-        <p:spPr>
-          <a:xfrm>
-            <a:off x="521207" y="448056"/>
-            <a:ext cx="10346818" cy="640080"/>
-          </a:xfrm>
-        </p:spPr>
-        <p:txBody>
-          <a:bodyPr rtlCol="0">
-            <a:normAutofit fontScale="90000"/>
-          </a:bodyPr>
-          <a:lstStyle/>
-          <a:p>
-            <a:r>
-              <a:rPr lang="en-US" altLang="ko-KR" dirty="0">
-                <a:cs typeface="Segoe UI Light" panose="020B0502040204020203" pitchFamily="34" charset="0"/>
-              </a:rPr>
-              <a:t>Compressing</a:t>
-            </a:r>
-            <a:r>
-              <a:rPr lang="ko-KR" altLang="en-US" dirty="0">
-                <a:cs typeface="Segoe UI Light" panose="020B0502040204020203" pitchFamily="34" charset="0"/>
-              </a:rPr>
-              <a:t> </a:t>
-            </a:r>
-            <a:r>
-              <a:rPr lang="en-US" altLang="ko-KR" dirty="0">
-                <a:cs typeface="Segoe UI Light" panose="020B0502040204020203" pitchFamily="34" charset="0"/>
-              </a:rPr>
-              <a:t>Images – Reducing rank by random choice of features</a:t>
-            </a:r>
-            <a:endParaRPr lang="ko" dirty="0">
-              <a:cs typeface="Segoe UI Light" panose="020B0502040204020203" pitchFamily="34" charset="0"/>
-            </a:endParaRPr>
-          </a:p>
-        </p:txBody>
-      </p:sp>
-      <p:sp>
-        <p:nvSpPr>
-          <p:cNvPr id="2" name="슬라이드 번호 개체 틀 1">
-            <a:extLst>
-              <a:ext uri="{FF2B5EF4-FFF2-40B4-BE49-F238E27FC236}">
-                <a16:creationId xmlns:a16="http://schemas.microsoft.com/office/drawing/2014/main" id="{47B80B36-1BD6-0C45-A304-60C53DC0021A}"/>
-              </a:ext>
-            </a:extLst>
-          </p:cNvPr>
-          <p:cNvSpPr>
-            <a:spLocks noGrp="1"/>
-          </p:cNvSpPr>
-          <p:nvPr>
-            <p:ph type="sldNum" sz="quarter" idx="4"/>
-          </p:nvPr>
-        </p:nvSpPr>
-        <p:spPr/>
-        <p:txBody>
-          <a:bodyPr/>
-          <a:lstStyle/>
-          <a:p>
-            <a:fld id="{9860EDB8-5305-433F-BE41-D7A86D811DB3}" type="slidenum">
-              <a:rPr lang="en-US" altLang="ko-KR" noProof="0" smtClean="0"/>
-              <a:pPr/>
-              <a:t>21</a:t>
-            </a:fld>
-            <a:endParaRPr lang="ko-KR" altLang="en-US" noProof="0"/>
-          </a:p>
-        </p:txBody>
-      </p:sp>
-      <p:sp>
-        <p:nvSpPr>
-          <p:cNvPr id="6" name="TextBox 5">
-            <a:extLst>
-              <a:ext uri="{FF2B5EF4-FFF2-40B4-BE49-F238E27FC236}">
-                <a16:creationId xmlns:a16="http://schemas.microsoft.com/office/drawing/2014/main" id="{3EF940CD-C23E-E371-CE45-25397F7D3D61}"/>
-              </a:ext>
-            </a:extLst>
-          </p:cNvPr>
-          <p:cNvSpPr txBox="1"/>
-          <p:nvPr/>
-        </p:nvSpPr>
-        <p:spPr>
-          <a:xfrm>
-            <a:off x="609600" y="1304243"/>
-            <a:ext cx="5486400" cy="279757"/>
-          </a:xfrm>
-          <a:prstGeom prst="rect">
-            <a:avLst/>
-          </a:prstGeom>
-          <a:noFill/>
-        </p:spPr>
-        <p:txBody>
-          <a:bodyPr wrap="square">
-            <a:spAutoFit/>
-          </a:bodyPr>
-          <a:lstStyle/>
-          <a:p>
-            <a:pPr>
-              <a:lnSpc>
-                <a:spcPts val="1575"/>
-              </a:lnSpc>
-              <a:buNone/>
-            </a:pPr>
-            <a:r>
-              <a:rPr lang="en-US" altLang="ko-KR" sz="1200" b="0" dirty="0" err="1">
-                <a:effectLst/>
-                <a:latin typeface="맑은 고딕 Semilight" panose="020B0502040204020203" pitchFamily="50" charset="-127"/>
-                <a:ea typeface="맑은 고딕 Semilight" panose="020B0502040204020203" pitchFamily="50" charset="-127"/>
-                <a:cs typeface="맑은 고딕 Semilight" panose="020B0502040204020203" pitchFamily="50" charset="-127"/>
-              </a:rPr>
-              <a:t>url</a:t>
-            </a:r>
-            <a:r>
-              <a:rPr lang="en-US" altLang="ko-KR" sz="1200" b="0" dirty="0">
-                <a:effectLst/>
-                <a:latin typeface="맑은 고딕 Semilight" panose="020B0502040204020203" pitchFamily="50" charset="-127"/>
-                <a:ea typeface="맑은 고딕 Semilight" panose="020B0502040204020203" pitchFamily="50" charset="-127"/>
-                <a:cs typeface="맑은 고딕 Semilight" panose="020B0502040204020203" pitchFamily="50" charset="-127"/>
-              </a:rPr>
-              <a:t> = "https://img.tf.co.kr/article/home/2025/07/22/202598011753169335.jpg"</a:t>
-            </a:r>
-          </a:p>
-        </p:txBody>
-      </p:sp>
-      <p:pic>
-        <p:nvPicPr>
-          <p:cNvPr id="11268" name="Picture 4">
-            <a:extLst>
-              <a:ext uri="{FF2B5EF4-FFF2-40B4-BE49-F238E27FC236}">
-                <a16:creationId xmlns:a16="http://schemas.microsoft.com/office/drawing/2014/main" id="{EB4727C5-628B-08D0-CD75-038EC1E9AA43}"/>
-              </a:ext>
-            </a:extLst>
-          </p:cNvPr>
-          <p:cNvPicPr>
-            <a:picLocks noChangeAspect="1" noChangeArrowheads="1"/>
-          </p:cNvPicPr>
-          <p:nvPr/>
-        </p:nvPicPr>
-        <p:blipFill>
-          <a:blip r:embed="rId3">
-            <a:extLst>
-              <a:ext uri="{28A0092B-C50C-407E-A947-70E740481C1C}">
-                <a14:useLocalDpi xmlns:a14="http://schemas.microsoft.com/office/drawing/2010/main" val="0"/>
-              </a:ext>
-            </a:extLst>
-          </a:blip>
-          <a:srcRect/>
-          <a:stretch>
-            <a:fillRect/>
-          </a:stretch>
-        </p:blipFill>
-        <p:spPr bwMode="auto">
-          <a:xfrm>
-            <a:off x="1228436" y="1800107"/>
-            <a:ext cx="8986982" cy="4869118"/>
-          </a:xfrm>
-          <a:prstGeom prst="rect">
-            <a:avLst/>
-          </a:prstGeom>
-          <a:noFill/>
-          <a:extLst>
-            <a:ext uri="{909E8E84-426E-40DD-AFC4-6F175D3DCCD1}">
-              <a14:hiddenFill xmlns:a14="http://schemas.microsoft.com/office/drawing/2010/main">
-                <a:solidFill>
-                  <a:srgbClr val="FFFFFF"/>
-                </a:solidFill>
-              </a14:hiddenFill>
-            </a:ext>
-          </a:extLst>
-        </p:spPr>
-      </p:pic>
-    </p:spTree>
-    <p:extLst>
-      <p:ext uri="{BB962C8B-B14F-4D97-AF65-F5344CB8AC3E}">
-        <p14:creationId xmlns:p14="http://schemas.microsoft.com/office/powerpoint/2010/main" val="2487259240"/>
-      </p:ext>
-    </p:extLst>
-  </p:cSld>
-  <p:clrMapOvr>
-    <a:masterClrMapping/>
-  </p:clrMapOvr>
-  <mc:AlternateContent xmlns:mc="http://schemas.openxmlformats.org/markup-compatibility/2006" xmlns:p14="http://schemas.microsoft.com/office/powerpoint/2010/main">
-    <mc:Choice Requires="p14">
-      <p:transition p14:dur="10"/>
-    </mc:Choice>
-    <mc:Fallback xmlns="">
-      <p:transition/>
-    </mc:Fallback>
-  </mc:AlternateContent>
-</p:sld>
-</file>
-
-<file path=ppt/slides/slide22.xml><?xml version="1.0" encoding="utf-8"?>
-<p:sld xmlns:a="http://schemas.openxmlformats.org/drawingml/2006/main" xmlns:r="http://schemas.openxmlformats.org/officeDocument/2006/relationships" xmlns:p="http://schemas.openxmlformats.org/presentationml/2006/main">
-  <p:cSld>
-    <p:spTree>
-      <p:nvGrpSpPr>
-        <p:cNvPr id="1" name="">
-          <a:extLst>
-            <a:ext uri="{FF2B5EF4-FFF2-40B4-BE49-F238E27FC236}">
-              <a16:creationId xmlns:a16="http://schemas.microsoft.com/office/drawing/2014/main" id="{5E1D481C-56DE-A303-2D4C-E12ED6DB109D}"/>
-            </a:ext>
-          </a:extLst>
-        </p:cNvPr>
-        <p:cNvGrpSpPr/>
-        <p:nvPr/>
-      </p:nvGrpSpPr>
-      <p:grpSpPr>
-        <a:xfrm>
-          <a:off x="0" y="0"/>
-          <a:ext cx="0" cy="0"/>
-          <a:chOff x="0" y="0"/>
-          <a:chExt cx="0" cy="0"/>
-        </a:xfrm>
-      </p:grpSpPr>
-      <p:sp>
-        <p:nvSpPr>
-          <p:cNvPr id="4" name="제목 3">
-            <a:extLst>
-              <a:ext uri="{FF2B5EF4-FFF2-40B4-BE49-F238E27FC236}">
-                <a16:creationId xmlns:a16="http://schemas.microsoft.com/office/drawing/2014/main" id="{EB6562AF-EDD3-7FD9-789C-A59F62BFA709}"/>
-              </a:ext>
-            </a:extLst>
-          </p:cNvPr>
-          <p:cNvSpPr>
-            <a:spLocks noGrp="1"/>
-          </p:cNvSpPr>
-          <p:nvPr>
-            <p:ph type="title"/>
-          </p:nvPr>
-        </p:nvSpPr>
-        <p:spPr>
-          <a:xfrm>
-            <a:off x="521207" y="448056"/>
-            <a:ext cx="9070468" cy="640080"/>
-          </a:xfrm>
-        </p:spPr>
-        <p:txBody>
-          <a:bodyPr rtlCol="0">
-            <a:normAutofit/>
-          </a:bodyPr>
-          <a:lstStyle/>
-          <a:p>
-            <a:r>
-              <a:rPr lang="en-US" altLang="ko-KR" dirty="0">
-                <a:cs typeface="Segoe UI Light" panose="020B0502040204020203" pitchFamily="34" charset="0"/>
-              </a:rPr>
-              <a:t>Compressing</a:t>
-            </a:r>
-            <a:r>
-              <a:rPr lang="ko-KR" altLang="en-US" dirty="0">
-                <a:cs typeface="Segoe UI Light" panose="020B0502040204020203" pitchFamily="34" charset="0"/>
-              </a:rPr>
-              <a:t> </a:t>
-            </a:r>
-            <a:r>
-              <a:rPr lang="en-US" altLang="ko-KR" dirty="0">
-                <a:cs typeface="Segoe UI Light" panose="020B0502040204020203" pitchFamily="34" charset="0"/>
-              </a:rPr>
-              <a:t>Images – Reducing rank by SVD, PCA</a:t>
-            </a:r>
-            <a:endParaRPr lang="ko" dirty="0">
-              <a:cs typeface="Segoe UI Light" panose="020B0502040204020203" pitchFamily="34" charset="0"/>
-            </a:endParaRPr>
-          </a:p>
-        </p:txBody>
-      </p:sp>
-      <p:sp>
-        <p:nvSpPr>
-          <p:cNvPr id="2" name="슬라이드 번호 개체 틀 1">
-            <a:extLst>
-              <a:ext uri="{FF2B5EF4-FFF2-40B4-BE49-F238E27FC236}">
-                <a16:creationId xmlns:a16="http://schemas.microsoft.com/office/drawing/2014/main" id="{60C72ECB-26ED-AC43-69FC-B181EE6AD3E6}"/>
-              </a:ext>
-            </a:extLst>
-          </p:cNvPr>
-          <p:cNvSpPr>
-            <a:spLocks noGrp="1"/>
-          </p:cNvSpPr>
-          <p:nvPr>
-            <p:ph type="sldNum" sz="quarter" idx="4"/>
-          </p:nvPr>
-        </p:nvSpPr>
-        <p:spPr/>
-        <p:txBody>
-          <a:bodyPr/>
-          <a:lstStyle/>
-          <a:p>
-            <a:fld id="{9860EDB8-5305-433F-BE41-D7A86D811DB3}" type="slidenum">
-              <a:rPr lang="en-US" altLang="ko-KR" noProof="0" smtClean="0"/>
-              <a:pPr/>
-              <a:t>22</a:t>
-            </a:fld>
-            <a:endParaRPr lang="ko-KR" altLang="en-US" noProof="0"/>
-          </a:p>
-        </p:txBody>
-      </p:sp>
-      <p:pic>
-        <p:nvPicPr>
-          <p:cNvPr id="3" name="Picture 2">
-            <a:extLst>
-              <a:ext uri="{FF2B5EF4-FFF2-40B4-BE49-F238E27FC236}">
-                <a16:creationId xmlns:a16="http://schemas.microsoft.com/office/drawing/2014/main" id="{BC1EDBD8-B293-7B46-746E-84D1944B03A9}"/>
-              </a:ext>
-            </a:extLst>
-          </p:cNvPr>
-          <p:cNvPicPr>
-            <a:picLocks noChangeAspect="1" noChangeArrowheads="1"/>
-          </p:cNvPicPr>
-          <p:nvPr/>
-        </p:nvPicPr>
-        <p:blipFill>
-          <a:blip r:embed="rId3">
-            <a:extLst>
-              <a:ext uri="{28A0092B-C50C-407E-A947-70E740481C1C}">
-                <a14:useLocalDpi xmlns:a14="http://schemas.microsoft.com/office/drawing/2010/main" val="0"/>
-              </a:ext>
-            </a:extLst>
-          </a:blip>
-          <a:srcRect/>
-          <a:stretch>
-            <a:fillRect/>
-          </a:stretch>
-        </p:blipFill>
-        <p:spPr bwMode="auto">
-          <a:xfrm>
-            <a:off x="1348508" y="1820059"/>
-            <a:ext cx="8765310" cy="4749018"/>
-          </a:xfrm>
-          <a:prstGeom prst="rect">
-            <a:avLst/>
-          </a:prstGeom>
-          <a:noFill/>
-          <a:extLst>
-            <a:ext uri="{909E8E84-426E-40DD-AFC4-6F175D3DCCD1}">
-              <a14:hiddenFill xmlns:a14="http://schemas.microsoft.com/office/drawing/2010/main">
-                <a:solidFill>
-                  <a:srgbClr val="FFFFFF"/>
-                </a:solidFill>
-              </a14:hiddenFill>
-            </a:ext>
-          </a:extLst>
-        </p:spPr>
-      </p:pic>
-      <p:sp>
-        <p:nvSpPr>
-          <p:cNvPr id="5" name="TextBox 4">
-            <a:extLst>
-              <a:ext uri="{FF2B5EF4-FFF2-40B4-BE49-F238E27FC236}">
-                <a16:creationId xmlns:a16="http://schemas.microsoft.com/office/drawing/2014/main" id="{451210D5-7927-EB22-F5B4-C0811943D190}"/>
-              </a:ext>
-            </a:extLst>
-          </p:cNvPr>
-          <p:cNvSpPr txBox="1"/>
-          <p:nvPr/>
-        </p:nvSpPr>
-        <p:spPr>
-          <a:xfrm>
-            <a:off x="604333" y="1358737"/>
-            <a:ext cx="5200463" cy="369332"/>
-          </a:xfrm>
-          <a:prstGeom prst="rect">
-            <a:avLst/>
-          </a:prstGeom>
-          <a:noFill/>
-        </p:spPr>
-        <p:txBody>
-          <a:bodyPr wrap="none" rtlCol="0">
-            <a:spAutoFit/>
-          </a:bodyPr>
-          <a:lstStyle/>
-          <a:p>
-            <a:r>
-              <a:rPr lang="en-US" altLang="ko-KR" dirty="0"/>
-              <a:t>Rank </a:t>
-            </a:r>
-            <a:r>
-              <a:rPr lang="ko-KR" altLang="en-US" dirty="0"/>
-              <a:t>가 </a:t>
-            </a:r>
-            <a:r>
-              <a:rPr lang="en-US" altLang="ko-KR" dirty="0"/>
-              <a:t>30, 10, 5</a:t>
-            </a:r>
-            <a:r>
-              <a:rPr lang="ko-KR" altLang="en-US" dirty="0"/>
-              <a:t>인데도 </a:t>
-            </a:r>
-            <a:r>
-              <a:rPr lang="en-US" altLang="ko-KR" dirty="0"/>
-              <a:t>face </a:t>
-            </a:r>
-            <a:r>
-              <a:rPr lang="ko-KR" altLang="en-US" dirty="0"/>
-              <a:t>식별이 가능한 이유</a:t>
-            </a:r>
-            <a:r>
-              <a:rPr lang="en-US" altLang="ko-KR" dirty="0"/>
-              <a:t>?</a:t>
-            </a:r>
-            <a:endParaRPr lang="ko-KR" altLang="en-US" dirty="0"/>
-          </a:p>
-        </p:txBody>
-      </p:sp>
-    </p:spTree>
-    <p:extLst>
-      <p:ext uri="{BB962C8B-B14F-4D97-AF65-F5344CB8AC3E}">
-        <p14:creationId xmlns:p14="http://schemas.microsoft.com/office/powerpoint/2010/main" val="1656759156"/>
       </p:ext>
     </p:extLst>
   </p:cSld>
@@ -11695,8 +10994,8 @@
           </a:extLst>
         </p:spPr>
       </p:pic>
-      <mc:AlternateContent xmlns:mc="http://schemas.openxmlformats.org/markup-compatibility/2006">
-        <mc:Choice xmlns:a14="http://schemas.microsoft.com/office/drawing/2010/main" Requires="a14">
+      <mc:AlternateContent xmlns:mc="http://schemas.openxmlformats.org/markup-compatibility/2006" xmlns:a14="http://schemas.microsoft.com/office/drawing/2010/main">
+        <mc:Choice Requires="a14">
           <p:sp>
             <p:nvSpPr>
               <p:cNvPr id="9" name="TextBox 8">
@@ -11999,7 +11298,7 @@
             </p:txBody>
           </p:sp>
         </mc:Choice>
-        <mc:Fallback>
+        <mc:Fallback xmlns="">
           <p:sp>
             <p:nvSpPr>
               <p:cNvPr id="9" name="TextBox 8">
